--- a/classes/parte-7-red-team-y-operaciones-ofensivas/168-evasion-de-defensas-antivirus-y-edr/clase-168-presentacion.pptx
+++ b/classes/parte-7-red-team-y-operaciones-ofensivas/168-evasion-de-defensas-antivirus-y-edr/clase-168-presentacion.pptx
@@ -17,6 +17,9 @@
     <p:sldId id="265" r:id="rId16"/>
     <p:sldId id="266" r:id="rId17"/>
     <p:sldId id="267" r:id="rId18"/>
+    <p:sldId id="268" r:id="rId19"/>
+    <p:sldId id="269" r:id="rId20"/>
+    <p:sldId id="270" r:id="rId21"/>
   </p:sldIdLst>
   <p:sldSz cx="9144000" cy="6858000" type="screen4x3"/>
   <p:notesSz cx="6858000" cy="9144000"/>
@@ -3198,7 +3201,7 @@
                   <a:srgbClr val="0B3D2E"/>
                 </a:solidFill>
               </a:rPr>
-              <a:t>⚠️ Errores comunes</a:t>
+              <a:t>✍️ Ejercicios</a:t>
             </a:r>
           </a:p>
         </p:txBody>
@@ -3236,67 +3239,82 @@
                   <a:srgbClr val="22282E"/>
                 </a:solidFill>
               </a:rPr>
-              <a:t>•  Evasión "mágica" que no entiendes — Copiaste código; estudia el mecanismo antes de usarlo</a:t>
-            </a:r>
-          </a:p>
-          <a:p>
-            <a:pPr>
-              <a:spcAft>
-                <a:spcPts val="600"/>
-              </a:spcAft>
-            </a:pPr>
-            <a:r>
-              <a:rPr sz="1500">
-                <a:solidFill>
-                  <a:srgbClr val="22282E"/>
-                </a:solidFill>
-              </a:rPr>
-              <a:t>•  Sigue detectando pese a syscalls — El EDR usa kernel callbacks/ETW-TI; usermode no basta</a:t>
-            </a:r>
-          </a:p>
-          <a:p>
-            <a:pPr>
-              <a:spcAft>
-                <a:spcPts val="600"/>
-              </a:spcAft>
-            </a:pPr>
-            <a:r>
-              <a:rPr sz="1500">
-                <a:solidFill>
-                  <a:srgbClr val="22282E"/>
-                </a:solidFill>
-              </a:rPr>
-              <a:t>•  El unhooking crashea el proceso — Copia de ntdll mal mapeada; respeta secciones/permisos</a:t>
-            </a:r>
-          </a:p>
-          <a:p>
-            <a:pPr>
-              <a:spcAft>
-                <a:spcPts val="600"/>
-              </a:spcAft>
-            </a:pPr>
-            <a:r>
-              <a:rPr sz="1500">
-                <a:solidFill>
-                  <a:srgbClr val="22282E"/>
-                </a:solidFill>
-              </a:rPr>
-              <a:t>•  Alerta por acceso a LSASS — La técnica es comportamental, no de firma; cambia el comportamiento, no el binario</a:t>
-            </a:r>
-          </a:p>
-          <a:p>
-            <a:pPr>
-              <a:spcAft>
-                <a:spcPts val="600"/>
-              </a:spcAft>
-            </a:pPr>
-            <a:r>
-              <a:rPr sz="1500">
-                <a:solidFill>
-                  <a:srgbClr val="22282E"/>
-                </a:solidFill>
-              </a:rPr>
-              <a:t>•  Funciona hoy, falla mañana — El EDR se actualizó; la evasión es una carrera continua</a:t>
+              <a:t>•  Explica la diferencia entre detección por firma y comportamental con un ejemplo.</a:t>
+            </a:r>
+          </a:p>
+          <a:p>
+            <a:pPr>
+              <a:spcAft>
+                <a:spcPts val="600"/>
+              </a:spcAft>
+            </a:pPr>
+            <a:r>
+              <a:rPr sz="1500">
+                <a:solidFill>
+                  <a:srgbClr val="22282E"/>
+                </a:solidFill>
+              </a:rPr>
+              <a:t>•  Describe cómo un EDR instala un hook en ntdll y cómo el unhooking lo revierte.</a:t>
+            </a:r>
+          </a:p>
+          <a:p>
+            <a:pPr>
+              <a:spcAft>
+                <a:spcPts val="600"/>
+              </a:spcAft>
+            </a:pPr>
+            <a:r>
+              <a:rPr sz="1500">
+                <a:solidFill>
+                  <a:srgbClr val="22282E"/>
+                </a:solidFill>
+              </a:rPr>
+              <a:t>•  Compara syscalls directas e indirectas en términos de sigilo.</a:t>
+            </a:r>
+          </a:p>
+          <a:p>
+            <a:pPr>
+              <a:spcAft>
+                <a:spcPts val="600"/>
+              </a:spcAft>
+            </a:pPr>
+            <a:r>
+              <a:rPr sz="1500">
+                <a:solidFill>
+                  <a:srgbClr val="22282E"/>
+                </a:solidFill>
+              </a:rPr>
+              <a:t>•  Explica por qué la ejecución en memoria genera menos telemetría de disco.</a:t>
+            </a:r>
+          </a:p>
+          <a:p>
+            <a:pPr>
+              <a:spcAft>
+                <a:spcPts val="600"/>
+              </a:spcAft>
+            </a:pPr>
+            <a:r>
+              <a:rPr sz="1500">
+                <a:solidFill>
+                  <a:srgbClr val="22282E"/>
+                </a:solidFill>
+              </a:rPr>
+              <a:t>•  Investiga qué es ETW-TI y por qué es más difícil de evadir que ETW clásico.</a:t>
+            </a:r>
+          </a:p>
+          <a:p>
+            <a:pPr>
+              <a:spcAft>
+                <a:spcPts val="600"/>
+              </a:spcAft>
+            </a:pPr>
+            <a:r>
+              <a:rPr sz="1500">
+                <a:solidFill>
+                  <a:srgbClr val="22282E"/>
+                </a:solidFill>
+              </a:rPr>
+              <a:t>•  Para tres técnicas ofensivas, describe su contramedida defensiva.</a:t>
             </a:r>
           </a:p>
         </p:txBody>
@@ -3347,7 +3365,7 @@
                   <a:srgbClr val="0B3D2E"/>
                 </a:solidFill>
               </a:rPr>
-              <a:t>❓ Preguntas frecuentes</a:t>
+              <a:t>📝 Reto verificable</a:t>
             </a:r>
           </a:p>
         </p:txBody>
@@ -3385,82 +3403,22 @@
                   <a:srgbClr val="22282E"/>
                 </a:solidFill>
               </a:rPr>
-              <a:t>•  ❓ ¿Cambiar el hash evade un EDR?</a:t>
-            </a:r>
-          </a:p>
-          <a:p>
-            <a:pPr>
-              <a:spcAft>
-                <a:spcPts val="600"/>
-              </a:spcAft>
-            </a:pPr>
-            <a:r>
-              <a:rPr sz="1500">
-                <a:solidFill>
-                  <a:srgbClr val="22282E"/>
-                </a:solidFill>
-              </a:rPr>
-              <a:t>•  Solo evade firmas estáticas. Los EDR modernos son comportamentales: detectan lo que el proceso hace, no cómo se llama el archivo.</a:t>
-            </a:r>
-          </a:p>
-          <a:p>
-            <a:pPr>
-              <a:spcAft>
-                <a:spcPts val="600"/>
-              </a:spcAft>
-            </a:pPr>
-            <a:r>
-              <a:rPr sz="1500">
-                <a:solidFill>
-                  <a:srgbClr val="22282E"/>
-                </a:solidFill>
-              </a:rPr>
-              <a:t>•  ❓ ¿Las syscalls directas son la solución definitiva?</a:t>
-            </a:r>
-          </a:p>
-          <a:p>
-            <a:pPr>
-              <a:spcAft>
-                <a:spcPts val="600"/>
-              </a:spcAft>
-            </a:pPr>
-            <a:r>
-              <a:rPr sz="1500">
-                <a:solidFill>
-                  <a:srgbClr val="22282E"/>
-                </a:solidFill>
-              </a:rPr>
-              <a:t>•  No. Evaden hooks usermode, pero el kernel (callbacks, ETW-TI) sigue viendo la actividad. Además, un proceso que llama syscalls "raras" es en sí sospechoso.</a:t>
-            </a:r>
-          </a:p>
-          <a:p>
-            <a:pPr>
-              <a:spcAft>
-                <a:spcPts val="600"/>
-              </a:spcAft>
-            </a:pPr>
-            <a:r>
-              <a:rPr sz="1500">
-                <a:solidFill>
-                  <a:srgbClr val="22282E"/>
-                </a:solidFill>
-              </a:rPr>
-              <a:t>•  ❓ ¿Esto no es enseñar a hacer malware?</a:t>
-            </a:r>
-          </a:p>
-          <a:p>
-            <a:pPr>
-              <a:spcAft>
-                <a:spcPts val="600"/>
-              </a:spcAft>
-            </a:pPr>
-            <a:r>
-              <a:rPr sz="1500">
-                <a:solidFill>
-                  <a:srgbClr val="22282E"/>
-                </a:solidFill>
-              </a:rPr>
-              <a:t>•  Enseñamos el mecanismo para defender: sin entender la evasión no se puede escribir una detección robusta. Todo se practica en laboratorio propio.</a:t>
+              <a:t>•  Partiendo de un implante que el EDR de tu lab detecta, aplica al menos dos técnicas de evasión y documenta el cambio en la telemetría.</a:t>
+            </a:r>
+          </a:p>
+          <a:p>
+            <a:pPr>
+              <a:spcAft>
+                <a:spcPts val="600"/>
+              </a:spcAft>
+            </a:pPr>
+            <a:r>
+              <a:rPr sz="1500">
+                <a:solidFill>
+                  <a:srgbClr val="22282E"/>
+                </a:solidFill>
+              </a:rPr>
+              <a:t>•  Criterio de aceptación: demuestras (con capturas de la consola del EDR/Sysmon) que la línea base generaba una alerta y que tras las técnicas aplicadas cambia el resultado; además, explicas qué fuente…</a:t>
             </a:r>
           </a:p>
         </p:txBody>
@@ -3511,7 +3469,7 @@
                   <a:srgbClr val="0B3D2E"/>
                 </a:solidFill>
               </a:rPr>
-              <a:t>🔗 Referencias</a:t>
+              <a:t>⚠️ Errores comunes</a:t>
             </a:r>
           </a:p>
         </p:txBody>
@@ -3549,56 +3507,474 @@
                   <a:srgbClr val="22282E"/>
                 </a:solidFill>
               </a:rPr>
-              <a:t>•  MITRE ATT&amp;CK — Defense Evasion (TA0005). &lt;https://attack.mitre.org/tactics/TA0005/&gt;</a:t>
-            </a:r>
-          </a:p>
-          <a:p>
-            <a:pPr>
-              <a:spcAft>
-                <a:spcPts val="600"/>
-              </a:spcAft>
-            </a:pPr>
-            <a:r>
-              <a:rPr sz="1500">
-                <a:solidFill>
-                  <a:srgbClr val="22282E"/>
-                </a:solidFill>
-              </a:rPr>
-              <a:t>•  Elastic Security Labs / research sobre EDR internals y hooking.</a:t>
-            </a:r>
-          </a:p>
-          <a:p>
-            <a:pPr>
-              <a:spcAft>
-                <a:spcPts val="600"/>
-              </a:spcAft>
-            </a:pPr>
-            <a:r>
-              <a:rPr sz="1500">
-                <a:solidFill>
-                  <a:srgbClr val="22282E"/>
-                </a:solidFill>
-              </a:rPr>
-              <a:t>•  SysWhispers (estudio de syscalls). &lt;https://github.com/klezVirus/SysWhispers3&gt;</a:t>
-            </a:r>
-          </a:p>
-          <a:p>
-            <a:pPr>
-              <a:spcAft>
-                <a:spcPts val="600"/>
-              </a:spcAft>
-            </a:pPr>
-            <a:r>
-              <a:rPr sz="1500">
-                <a:solidFill>
-                  <a:srgbClr val="22282E"/>
-                </a:solidFill>
-              </a:rPr>
-              <a:t>•  Clark, B. — RTFM: Red Team Field Manual v2.</a:t>
-            </a:r>
-          </a:p>
-        </p:txBody>
-      </p:sp>
+              <a:t>•  Evasión "mágica" que no entiendes — Copiaste código; estudia el mecanismo antes de usarlo</a:t>
+            </a:r>
+          </a:p>
+          <a:p>
+            <a:pPr>
+              <a:spcAft>
+                <a:spcPts val="600"/>
+              </a:spcAft>
+            </a:pPr>
+            <a:r>
+              <a:rPr sz="1500">
+                <a:solidFill>
+                  <a:srgbClr val="22282E"/>
+                </a:solidFill>
+              </a:rPr>
+              <a:t>•  Sigue detectando pese a syscalls — El EDR usa kernel callbacks/ETW-TI; usermode no basta</a:t>
+            </a:r>
+          </a:p>
+          <a:p>
+            <a:pPr>
+              <a:spcAft>
+                <a:spcPts val="600"/>
+              </a:spcAft>
+            </a:pPr>
+            <a:r>
+              <a:rPr sz="1500">
+                <a:solidFill>
+                  <a:srgbClr val="22282E"/>
+                </a:solidFill>
+              </a:rPr>
+              <a:t>•  El unhooking crashea el proceso — Copia de ntdll mal mapeada; respeta secciones/permisos</a:t>
+            </a:r>
+          </a:p>
+          <a:p>
+            <a:pPr>
+              <a:spcAft>
+                <a:spcPts val="600"/>
+              </a:spcAft>
+            </a:pPr>
+            <a:r>
+              <a:rPr sz="1500">
+                <a:solidFill>
+                  <a:srgbClr val="22282E"/>
+                </a:solidFill>
+              </a:rPr>
+              <a:t>•  Alerta por acceso a LSASS — La técnica es comportamental, no de firma; cambia el comportamiento, no el binario</a:t>
+            </a:r>
+          </a:p>
+          <a:p>
+            <a:pPr>
+              <a:spcAft>
+                <a:spcPts val="600"/>
+              </a:spcAft>
+            </a:pPr>
+            <a:r>
+              <a:rPr sz="1500">
+                <a:solidFill>
+                  <a:srgbClr val="22282E"/>
+                </a:solidFill>
+              </a:rPr>
+              <a:t>•  Funciona hoy, falla mañana — El EDR se actualizó; la evasión es una carrera continua</a:t>
+            </a:r>
+          </a:p>
+        </p:txBody>
+      </p:sp>
+    </p:spTree>
+  </p:cSld>
+  <p:clrMapOvr>
+    <a:masterClrMapping/>
+  </p:clrMapOvr>
+</p:sld>
+</file>
+
+<file path=ppt/slides/slide13.xml><?xml version="1.0" encoding="utf-8"?>
+<p:sld xmlns:a="http://schemas.openxmlformats.org/drawingml/2006/main" xmlns:p="http://schemas.openxmlformats.org/presentationml/2006/main" xmlns:r="http://schemas.openxmlformats.org/officeDocument/2006/relationships">
+  <p:cSld>
+    <p:spTree>
+      <p:nvGrpSpPr>
+        <p:cNvPr id="1" name=""/>
+        <p:cNvGrpSpPr/>
+        <p:nvPr/>
+      </p:nvGrpSpPr>
+      <p:grpSpPr/>
+      <p:sp>
+        <p:nvSpPr>
+          <p:cNvPr id="2" name="TextBox 1"/>
+          <p:cNvSpPr txBox="1"/>
+          <p:nvPr/>
+        </p:nvSpPr>
+        <p:spPr>
+          <a:xfrm>
+            <a:off x="457200" y="320040"/>
+            <a:ext cx="8229600" cy="822960"/>
+          </a:xfrm>
+          <a:prstGeom prst="rect">
+            <a:avLst/>
+          </a:prstGeom>
+          <a:noFill/>
+        </p:spPr>
+        <p:txBody>
+          <a:bodyPr wrap="square">
+            <a:spAutoFit/>
+          </a:bodyPr>
+          <a:lstStyle/>
+          <a:p>
+            <a:r>
+              <a:rPr sz="2600" b="1">
+                <a:solidFill>
+                  <a:srgbClr val="0B3D2E"/>
+                </a:solidFill>
+              </a:rPr>
+              <a:t>❓ Preguntas frecuentes</a:t>
+            </a:r>
+          </a:p>
+        </p:txBody>
+      </p:sp>
+      <p:sp>
+        <p:nvSpPr>
+          <p:cNvPr id="3" name="TextBox 2"/>
+          <p:cNvSpPr txBox="1"/>
+          <p:nvPr/>
+        </p:nvSpPr>
+        <p:spPr>
+          <a:xfrm>
+            <a:off x="457200" y="1280160"/>
+            <a:ext cx="8229600" cy="4937760"/>
+          </a:xfrm>
+          <a:prstGeom prst="rect">
+            <a:avLst/>
+          </a:prstGeom>
+          <a:noFill/>
+        </p:spPr>
+        <p:txBody>
+          <a:bodyPr wrap="square">
+            <a:spAutoFit/>
+          </a:bodyPr>
+          <a:lstStyle/>
+          <a:p>
+            <a:pPr>
+              <a:spcAft>
+                <a:spcPts val="600"/>
+              </a:spcAft>
+            </a:pPr>
+            <a:r>
+              <a:rPr sz="1500">
+                <a:solidFill>
+                  <a:srgbClr val="22282E"/>
+                </a:solidFill>
+              </a:rPr>
+              <a:t>•  ❓ ¿Cambiar el hash evade un EDR?</a:t>
+            </a:r>
+          </a:p>
+          <a:p>
+            <a:pPr>
+              <a:spcAft>
+                <a:spcPts val="600"/>
+              </a:spcAft>
+            </a:pPr>
+            <a:r>
+              <a:rPr sz="1500">
+                <a:solidFill>
+                  <a:srgbClr val="22282E"/>
+                </a:solidFill>
+              </a:rPr>
+              <a:t>•  Solo evade firmas estáticas. Los EDR modernos son comportamentales: detectan lo que el proceso hace, no cómo se llama el archivo.</a:t>
+            </a:r>
+          </a:p>
+          <a:p>
+            <a:pPr>
+              <a:spcAft>
+                <a:spcPts val="600"/>
+              </a:spcAft>
+            </a:pPr>
+            <a:r>
+              <a:rPr sz="1500">
+                <a:solidFill>
+                  <a:srgbClr val="22282E"/>
+                </a:solidFill>
+              </a:rPr>
+              <a:t>•  ❓ ¿Las syscalls directas son la solución definitiva?</a:t>
+            </a:r>
+          </a:p>
+          <a:p>
+            <a:pPr>
+              <a:spcAft>
+                <a:spcPts val="600"/>
+              </a:spcAft>
+            </a:pPr>
+            <a:r>
+              <a:rPr sz="1500">
+                <a:solidFill>
+                  <a:srgbClr val="22282E"/>
+                </a:solidFill>
+              </a:rPr>
+              <a:t>•  No. Evaden hooks usermode, pero el kernel (callbacks, ETW-TI) sigue viendo la actividad. Además, un proceso que llama syscalls "raras" es en sí sospechoso.</a:t>
+            </a:r>
+          </a:p>
+          <a:p>
+            <a:pPr>
+              <a:spcAft>
+                <a:spcPts val="600"/>
+              </a:spcAft>
+            </a:pPr>
+            <a:r>
+              <a:rPr sz="1500">
+                <a:solidFill>
+                  <a:srgbClr val="22282E"/>
+                </a:solidFill>
+              </a:rPr>
+              <a:t>•  ❓ ¿Esto no es enseñar a hacer malware?</a:t>
+            </a:r>
+          </a:p>
+          <a:p>
+            <a:pPr>
+              <a:spcAft>
+                <a:spcPts val="600"/>
+              </a:spcAft>
+            </a:pPr>
+            <a:r>
+              <a:rPr sz="1500">
+                <a:solidFill>
+                  <a:srgbClr val="22282E"/>
+                </a:solidFill>
+              </a:rPr>
+              <a:t>•  Enseñamos el mecanismo para defender: sin entender la evasión no se puede escribir una detección robusta. Todo se practica en laboratorio propio.</a:t>
+            </a:r>
+          </a:p>
+        </p:txBody>
+      </p:sp>
+    </p:spTree>
+  </p:cSld>
+  <p:clrMapOvr>
+    <a:masterClrMapping/>
+  </p:clrMapOvr>
+</p:sld>
+</file>
+
+<file path=ppt/slides/slide14.xml><?xml version="1.0" encoding="utf-8"?>
+<p:sld xmlns:a="http://schemas.openxmlformats.org/drawingml/2006/main" xmlns:p="http://schemas.openxmlformats.org/presentationml/2006/main" xmlns:r="http://schemas.openxmlformats.org/officeDocument/2006/relationships">
+  <p:cSld>
+    <p:spTree>
+      <p:nvGrpSpPr>
+        <p:cNvPr id="1" name=""/>
+        <p:cNvGrpSpPr/>
+        <p:nvPr/>
+      </p:nvGrpSpPr>
+      <p:grpSpPr/>
+      <p:sp>
+        <p:nvSpPr>
+          <p:cNvPr id="2" name="TextBox 1"/>
+          <p:cNvSpPr txBox="1"/>
+          <p:nvPr/>
+        </p:nvSpPr>
+        <p:spPr>
+          <a:xfrm>
+            <a:off x="457200" y="320040"/>
+            <a:ext cx="8229600" cy="822960"/>
+          </a:xfrm>
+          <a:prstGeom prst="rect">
+            <a:avLst/>
+          </a:prstGeom>
+          <a:noFill/>
+        </p:spPr>
+        <p:txBody>
+          <a:bodyPr wrap="square">
+            <a:spAutoFit/>
+          </a:bodyPr>
+          <a:lstStyle/>
+          <a:p>
+            <a:r>
+              <a:rPr sz="2600" b="1">
+                <a:solidFill>
+                  <a:srgbClr val="0B3D2E"/>
+                </a:solidFill>
+              </a:rPr>
+              <a:t>🔗 Referencias</a:t>
+            </a:r>
+          </a:p>
+        </p:txBody>
+      </p:sp>
+      <p:sp>
+        <p:nvSpPr>
+          <p:cNvPr id="3" name="TextBox 2"/>
+          <p:cNvSpPr txBox="1"/>
+          <p:nvPr/>
+        </p:nvSpPr>
+        <p:spPr>
+          <a:xfrm>
+            <a:off x="457200" y="1280160"/>
+            <a:ext cx="8229600" cy="4937760"/>
+          </a:xfrm>
+          <a:prstGeom prst="rect">
+            <a:avLst/>
+          </a:prstGeom>
+          <a:noFill/>
+        </p:spPr>
+        <p:txBody>
+          <a:bodyPr wrap="square">
+            <a:spAutoFit/>
+          </a:bodyPr>
+          <a:lstStyle/>
+          <a:p>
+            <a:pPr>
+              <a:spcAft>
+                <a:spcPts val="600"/>
+              </a:spcAft>
+            </a:pPr>
+            <a:r>
+              <a:rPr sz="1500">
+                <a:solidFill>
+                  <a:srgbClr val="22282E"/>
+                </a:solidFill>
+              </a:rPr>
+              <a:t>•  MITRE ATT&amp;CK — Defense Evasion (TA0005). &lt;https://attack.mitre.org/tactics/TA0005/&gt; — taxonomía para relacionar técnicas de evasión con mitigaciones y fuentes de detección, sin asumir invisibilidad.</a:t>
+            </a:r>
+          </a:p>
+          <a:p>
+            <a:pPr>
+              <a:spcAft>
+                <a:spcPts val="600"/>
+              </a:spcAft>
+            </a:pPr>
+            <a:r>
+              <a:rPr sz="1500">
+                <a:solidFill>
+                  <a:srgbClr val="22282E"/>
+                </a:solidFill>
+              </a:rPr>
+              <a:t>•  Microsoft — Event Tracing for Windows. &lt;https://learn.microsoft.com/en-us/windows-hardware/drivers/devtest/event-tracing-for-windows--etw-&gt; — base técnica para distinguir proveedores, sesiones y…</a:t>
+            </a:r>
+          </a:p>
+          <a:p>
+            <a:pPr>
+              <a:spcAft>
+                <a:spcPts val="600"/>
+              </a:spcAft>
+            </a:pPr>
+            <a:r>
+              <a:rPr sz="1500">
+                <a:solidFill>
+                  <a:srgbClr val="22282E"/>
+                </a:solidFill>
+              </a:rPr>
+              <a:t>•  Microsoft — Windows Defender Application Control and AppLocker Overview.…</a:t>
+            </a:r>
+          </a:p>
+          <a:p>
+            <a:pPr>
+              <a:spcAft>
+                <a:spcPts val="600"/>
+              </a:spcAft>
+            </a:pPr>
+            <a:r>
+              <a:rPr sz="1500">
+                <a:solidFill>
+                  <a:srgbClr val="22282E"/>
+                </a:solidFill>
+              </a:rPr>
+              <a:t>•  Elastic Security Labs — Kernel ETW is the best ETW. &lt;https://www.elastic.co/security-labs/kernel-etw-best-etw&gt; — investigación del fabricante usada para contrastar hooks en proceso con fuentes ETW…</a:t>
+            </a:r>
+          </a:p>
+          <a:p>
+            <a:pPr>
+              <a:spcAft>
+                <a:spcPts val="600"/>
+              </a:spcAft>
+            </a:pPr>
+            <a:r>
+              <a:rPr sz="1500">
+                <a:solidFill>
+                  <a:srgbClr val="22282E"/>
+                </a:solidFill>
+              </a:rPr>
+              <a:t>•  SysWhispers3. &lt;https://github.com/klezVirus/SysWhispers3&gt; — código de estudio para comprender resolución de llamadas; no se toma como prueba de evasión universal.</a:t>
+            </a:r>
+          </a:p>
+          <a:p>
+            <a:pPr>
+              <a:spcAft>
+                <a:spcPts val="600"/>
+              </a:spcAft>
+            </a:pPr>
+            <a:r>
+              <a:rPr sz="1500">
+                <a:solidFill>
+                  <a:srgbClr val="22282E"/>
+                </a:solidFill>
+              </a:rPr>
+              <a:t>•  Clark, B. — RTFM: Red Team Field Manual v2 — referencia operativa complementaria para el entorno controlado.</a:t>
+            </a:r>
+          </a:p>
+        </p:txBody>
+      </p:sp>
+    </p:spTree>
+  </p:cSld>
+  <p:clrMapOvr>
+    <a:masterClrMapping/>
+  </p:clrMapOvr>
+</p:sld>
+</file>
+
+<file path=ppt/slides/slide15.xml><?xml version="1.0" encoding="utf-8"?>
+<p:sld xmlns:a="http://schemas.openxmlformats.org/drawingml/2006/main" xmlns:p="http://schemas.openxmlformats.org/presentationml/2006/main" xmlns:r="http://schemas.openxmlformats.org/officeDocument/2006/relationships">
+  <p:cSld>
+    <p:spTree>
+      <p:nvGrpSpPr>
+        <p:cNvPr id="1" name=""/>
+        <p:cNvGrpSpPr/>
+        <p:nvPr/>
+      </p:nvGrpSpPr>
+      <p:grpSpPr/>
+      <p:sp>
+        <p:nvSpPr>
+          <p:cNvPr id="2" name="TextBox 1"/>
+          <p:cNvSpPr txBox="1"/>
+          <p:nvPr/>
+        </p:nvSpPr>
+        <p:spPr>
+          <a:xfrm>
+            <a:off x="457200" y="274320"/>
+            <a:ext cx="8229600" cy="640080"/>
+          </a:xfrm>
+          <a:prstGeom prst="rect">
+            <a:avLst/>
+          </a:prstGeom>
+          <a:noFill/>
+        </p:spPr>
+        <p:txBody>
+          <a:bodyPr wrap="square">
+            <a:spAutoFit/>
+          </a:bodyPr>
+          <a:lstStyle/>
+          <a:p>
+            <a:r>
+              <a:rPr sz="2200" b="1">
+                <a:solidFill>
+                  <a:srgbClr val="0B3D2E"/>
+                </a:solidFill>
+              </a:rPr>
+              <a:t>Diagrama de la clase</a:t>
+            </a:r>
+          </a:p>
+        </p:txBody>
+      </p:sp>
+      <p:pic>
+        <p:nvPicPr>
+          <p:cNvPr id="3" name="Picture 2" descr="d441fee42d9d4b0c.png"/>
+          <p:cNvPicPr>
+            <a:picLocks noChangeAspect="1"/>
+          </p:cNvPicPr>
+          <p:nvPr/>
+        </p:nvPicPr>
+        <p:blipFill>
+          <a:blip r:embed="rId2"/>
+          <a:stretch>
+            <a:fillRect/>
+          </a:stretch>
+        </p:blipFill>
+        <p:spPr>
+          <a:xfrm>
+            <a:off x="1015243" y="1097280"/>
+            <a:ext cx="7113514" cy="5303520"/>
+          </a:xfrm>
+          <a:prstGeom prst="rect">
+            <a:avLst/>
+          </a:prstGeom>
+        </p:spPr>
+      </p:pic>
     </p:spTree>
   </p:cSld>
   <p:clrMapOvr>
@@ -3683,7 +4059,7 @@
                   <a:srgbClr val="22282E"/>
                 </a:solidFill>
               </a:rPr>
-              <a:t>•  Entender cómo funcionan los antivirus y EDR modernos para poder evadirlos de forma comprendida (no por copiar-pegar). El alumno estudiará las técnicas de detección (firmas, heurística, hooks de usermode, ETW, callbacks del kernel) y las contramedidas ofensivas responsables (unhooking, syscalls directas, ejecución en memoria), siempre en su laboratorio y con la mirada puesta en cómo el Blue Team lo detecta.</a:t>
+              <a:t>•  Entender cómo funcionan los antivirus y EDR modernos para poder evadirlos de forma comprendida (no por copiar-pegar). El alumno estudiará las técnicas de detección (firmas, heurística, hooks de…</a:t>
             </a:r>
           </a:p>
         </p:txBody>
@@ -4077,7 +4453,7 @@
                   <a:srgbClr val="0B3D2E"/>
                 </a:solidFill>
               </a:rPr>
-              <a:t>📖 Definiciones y características</a:t>
+              <a:t>🧠 Explicación en profundidad</a:t>
             </a:r>
           </a:p>
         </p:txBody>
@@ -4115,82 +4491,97 @@
                   <a:srgbClr val="22282E"/>
                 </a:solidFill>
               </a:rPr>
-              <a:t>•  Detección por firma: comparación con hashes/patrones conocidos. Característica: rápida pero evadible con cambios mínimos.</a:t>
-            </a:r>
-          </a:p>
-          <a:p>
-            <a:pPr>
-              <a:spcAft>
-                <a:spcPts val="600"/>
-              </a:spcAft>
-            </a:pPr>
-            <a:r>
-              <a:rPr sz="1500">
-                <a:solidFill>
-                  <a:srgbClr val="22282E"/>
-                </a:solidFill>
-              </a:rPr>
-              <a:t>•  Detección heurística/comportamental: analiza acciones (inyección, acceso a LSASS). Característica: más robusta, base de los EDR.</a:t>
-            </a:r>
-          </a:p>
-          <a:p>
-            <a:pPr>
-              <a:spcAft>
-                <a:spcPts val="600"/>
-              </a:spcAft>
-            </a:pPr>
-            <a:r>
-              <a:rPr sz="1500">
-                <a:solidFill>
-                  <a:srgbClr val="22282E"/>
-                </a:solidFill>
-              </a:rPr>
-              <a:t>•  Userland hooking: el EDR reescribe funciones de ntdll.dll para inspeccionarlas. Característica: evadible con unhooking o syscalls.</a:t>
-            </a:r>
-          </a:p>
-          <a:p>
-            <a:pPr>
-              <a:spcAft>
-                <a:spcPts val="600"/>
-              </a:spcAft>
-            </a:pPr>
-            <a:r>
-              <a:rPr sz="1500">
-                <a:solidFill>
-                  <a:srgbClr val="22282E"/>
-                </a:solidFill>
-              </a:rPr>
-              <a:t>•  ETW (Event Tracing for Windows): telemetría del sistema (ej. Microsoft-Windows-Threat-Intelligence). Característica: fuente clave; algunos ataques buscan silenciarla.</a:t>
-            </a:r>
-          </a:p>
-          <a:p>
-            <a:pPr>
-              <a:spcAft>
-                <a:spcPts val="600"/>
-              </a:spcAft>
-            </a:pPr>
-            <a:r>
-              <a:rPr sz="1500">
-                <a:solidFill>
-                  <a:srgbClr val="22282E"/>
-                </a:solidFill>
-              </a:rPr>
-              <a:t>•  Kernel callbacks: notificaciones del kernel (process/thread/image load) que el driver del EDR recibe. Característica: difíciles de evadir desde usermode.</a:t>
-            </a:r>
-          </a:p>
-          <a:p>
-            <a:pPr>
-              <a:spcAft>
-                <a:spcPts val="600"/>
-              </a:spcAft>
-            </a:pPr>
-            <a:r>
-              <a:rPr sz="1500">
-                <a:solidFill>
-                  <a:srgbClr val="22282E"/>
-                </a:solidFill>
-              </a:rPr>
-              <a:t>•  Direct/indirect syscalls: invocar servicios del kernel sin pasar por la ntdll hookeada. Característica: evade hooks usermode pero deja otras señales.</a:t>
+              <a:t>•  Un error pedagógico frecuente es imaginar el EDR como una función colocada delante de cada API. En realidad, el producto combina sensores, eventos del sistema, contexto histórico y una capa de…</a:t>
+            </a:r>
+          </a:p>
+          <a:p>
+            <a:pPr>
+              <a:spcAft>
+                <a:spcPts val="600"/>
+              </a:spcAft>
+            </a:pPr>
+            <a:r>
+              <a:rPr sz="1500">
+                <a:solidFill>
+                  <a:srgbClr val="22282E"/>
+                </a:solidFill>
+              </a:rPr>
+              <a:t>•  La detección ocurre además en momentos diferentes. Antes de ejecutar puede evaluarse reputación, firma o estructura del archivo. Durante la ejecución se correlacionan relaciones padre-hijo, memoria…</a:t>
+            </a:r>
+          </a:p>
+          <a:p>
+            <a:pPr>
+              <a:spcAft>
+                <a:spcPts val="600"/>
+              </a:spcAft>
+            </a:pPr>
+            <a:r>
+              <a:rPr sz="1500">
+                <a:solidFill>
+                  <a:srgbClr val="22282E"/>
+                </a:solidFill>
+              </a:rPr>
+              <a:t>•  Una firma puede reconocer una secuencia de bytes, una cadena o una familia conocida con muy poco coste. La heurística busca propiedades sospechosas sin exigir identidad exacta. La analítica…</a:t>
+            </a:r>
+          </a:p>
+          <a:p>
+            <a:pPr>
+              <a:spcAft>
+                <a:spcPts val="600"/>
+              </a:spcAft>
+            </a:pPr>
+            <a:r>
+              <a:rPr sz="1500">
+                <a:solidFill>
+                  <a:srgbClr val="22282E"/>
+                </a:solidFill>
+              </a:rPr>
+              <a:t>•  Esta distinción cambia el laboratorio. No basta con anotar «detectado/no detectado». Debe registrarse qué control produjo el resultado, en qué etapa, con qué evento y si la prevención fue local o…</a:t>
+            </a:r>
+          </a:p>
+          <a:p>
+            <a:pPr>
+              <a:spcAft>
+                <a:spcPts val="600"/>
+              </a:spcAft>
+            </a:pPr>
+            <a:r>
+              <a:rPr sz="1500">
+                <a:solidFill>
+                  <a:srgbClr val="22282E"/>
+                </a:solidFill>
+              </a:rPr>
+              <a:t>•  Los hooks en bibliotecas de usuario son una posible fuente de observación, no una propiedad universal que deba asumirse. Restaurar código de una biblioteca o cambiar la ruta de una llamada puede…</a:t>
+            </a:r>
+          </a:p>
+          <a:p>
+            <a:pPr>
+              <a:spcAft>
+                <a:spcPts val="600"/>
+              </a:spcAft>
+            </a:pPr>
+            <a:r>
+              <a:rPr sz="1500">
+                <a:solidFill>
+                  <a:srgbClr val="22282E"/>
+                </a:solidFill>
+              </a:rPr>
+              <a:t>•  La pregunta profesional no es «¿cómo hago invisible esta acción?», sino «¿qué fuentes se conservaron y cuáles se degradaron?». Esa pregunta permite al equipo azul diseñar cobertura redundante y al…</a:t>
+            </a:r>
+          </a:p>
+          <a:p>
+            <a:pPr>
+              <a:spcAft>
+                <a:spcPts val="600"/>
+              </a:spcAft>
+            </a:pPr>
+            <a:r>
+              <a:rPr sz="1500">
+                <a:solidFill>
+                  <a:srgbClr val="22282E"/>
+                </a:solidFill>
+              </a:rPr>
+              <a:t>•  Se cambia una sola variable por iteración: misma máquina, identidad, muestra de prueba y ventana temporal. Primero se ejecuta la línea base; después, una variante; por último, se comparan archivos…</a:t>
             </a:r>
           </a:p>
         </p:txBody>
@@ -4241,7 +4632,7 @@
                   <a:srgbClr val="0B3D2E"/>
                 </a:solidFill>
               </a:rPr>
-              <a:t>🧰 Herramientas y preparación</a:t>
+              <a:t>📖 Definiciones y características</a:t>
             </a:r>
           </a:p>
         </p:txBody>
@@ -4279,52 +4670,82 @@
                   <a:srgbClr val="22282E"/>
                 </a:solidFill>
               </a:rPr>
-              <a:t>•  Un EDR de laboratorio (versión de evaluación o Microsoft Defender for Endpoint en un tenant de prueba) y Sysmon (Parte 8) para telemetría.</a:t>
-            </a:r>
-          </a:p>
-          <a:p>
-            <a:pPr>
-              <a:spcAft>
-                <a:spcPts val="600"/>
-              </a:spcAft>
-            </a:pPr>
-            <a:r>
-              <a:rPr sz="1500">
-                <a:solidFill>
-                  <a:srgbClr val="22282E"/>
-                </a:solidFill>
-              </a:rPr>
-              <a:t>•  Windows internals: entender PE, ntdll y syscalls (repaso Partes 5 y 6).</a:t>
-            </a:r>
-          </a:p>
-          <a:p>
-            <a:pPr>
-              <a:spcAft>
-                <a:spcPts val="600"/>
-              </a:spcAft>
-            </a:pPr>
-            <a:r>
-              <a:rPr sz="1500">
-                <a:solidFill>
-                  <a:srgbClr val="22282E"/>
-                </a:solidFill>
-              </a:rPr>
-              <a:t>•  Proyectos de estudio open source (SysWhispers y referencias de unhooking) para comprender la mecánica.</a:t>
-            </a:r>
-          </a:p>
-          <a:p>
-            <a:pPr>
-              <a:spcAft>
-                <a:spcPts val="600"/>
-              </a:spcAft>
-            </a:pPr>
-            <a:r>
-              <a:rPr sz="1500">
-                <a:solidFill>
-                  <a:srgbClr val="22282E"/>
-                </a:solidFill>
-              </a:rPr>
-              <a:t>•  El C2 de las clases anteriores como carga a evadir.</a:t>
+              <a:t>•  Detección por firma: comparación con hashes/patrones conocidos. Característica: rápida pero evadible con cambios mínimos.</a:t>
+            </a:r>
+          </a:p>
+          <a:p>
+            <a:pPr>
+              <a:spcAft>
+                <a:spcPts val="600"/>
+              </a:spcAft>
+            </a:pPr>
+            <a:r>
+              <a:rPr sz="1500">
+                <a:solidFill>
+                  <a:srgbClr val="22282E"/>
+                </a:solidFill>
+              </a:rPr>
+              <a:t>•  Detección heurística/comportamental: analiza acciones (inyección, acceso a LSASS). Característica: más robusta, base de los EDR.</a:t>
+            </a:r>
+          </a:p>
+          <a:p>
+            <a:pPr>
+              <a:spcAft>
+                <a:spcPts val="600"/>
+              </a:spcAft>
+            </a:pPr>
+            <a:r>
+              <a:rPr sz="1500">
+                <a:solidFill>
+                  <a:srgbClr val="22282E"/>
+                </a:solidFill>
+              </a:rPr>
+              <a:t>•  Userland hooking: instrumentación de funciones en modo usuario empleada por algunos productos y versiones. Característica: es una fuente posible, no la arquitectura completa de todo EDR.</a:t>
+            </a:r>
+          </a:p>
+          <a:p>
+            <a:pPr>
+              <a:spcAft>
+                <a:spcPts val="600"/>
+              </a:spcAft>
+            </a:pPr>
+            <a:r>
+              <a:rPr sz="1500">
+                <a:solidFill>
+                  <a:srgbClr val="22282E"/>
+                </a:solidFill>
+              </a:rPr>
+              <a:t>•  ETW (Event Tracing for Windows): infraestructura de trazado con múltiples proveedores y consumidores. Característica: la ubicación y protección de cada proveedor condicionan su resistencia a…</a:t>
+            </a:r>
+          </a:p>
+          <a:p>
+            <a:pPr>
+              <a:spcAft>
+                <a:spcPts val="600"/>
+              </a:spcAft>
+            </a:pPr>
+            <a:r>
+              <a:rPr sz="1500">
+                <a:solidFill>
+                  <a:srgbClr val="22282E"/>
+                </a:solidFill>
+              </a:rPr>
+              <a:t>•  Kernel callbacks: notificaciones del kernel (process/thread/image load) que el driver del EDR recibe. Característica: difíciles de evadir desde usermode.</a:t>
+            </a:r>
+          </a:p>
+          <a:p>
+            <a:pPr>
+              <a:spcAft>
+                <a:spcPts val="600"/>
+              </a:spcAft>
+            </a:pPr>
+            <a:r>
+              <a:rPr sz="1500">
+                <a:solidFill>
+                  <a:srgbClr val="22282E"/>
+                </a:solidFill>
+              </a:rPr>
+              <a:t>•  Direct/indirect syscalls: rutas alternativas para alcanzar una llamada al sistema y alterar la observación en modo usuario. Característica: no eliminan las señales del kernel, memoria, proceso o…</a:t>
             </a:r>
           </a:p>
         </p:txBody>
@@ -4375,7 +4796,7 @@
                   <a:srgbClr val="0B3D2E"/>
                 </a:solidFill>
               </a:rPr>
-              <a:t>🧪 Laboratorio guiado</a:t>
+              <a:t>📔 Glosario</a:t>
             </a:r>
           </a:p>
         </p:txBody>
@@ -4413,97 +4834,97 @@
                   <a:srgbClr val="22282E"/>
                 </a:solidFill>
               </a:rPr>
-              <a:t>•  Línea base de detección. Ejecuta un implante C2 sin evasión en la VM con EDR y observa la alerta; anota qué evento la disparó.</a:t>
-            </a:r>
-          </a:p>
-          <a:p>
-            <a:pPr>
-              <a:spcAft>
-                <a:spcPts val="600"/>
-              </a:spcAft>
-            </a:pPr>
-            <a:r>
-              <a:rPr sz="1500">
-                <a:solidFill>
-                  <a:srgbClr val="22282E"/>
-                </a:solidFill>
-              </a:rPr>
-              <a:t>•  Analiza los hooks. Con un depurador, inspecciona una función como NtAllocateVirtualMemory en un proceso vigilado y localiza el salto (jmp) que el EDR insertó al inicio.</a:t>
-            </a:r>
-          </a:p>
-          <a:p>
-            <a:pPr>
-              <a:spcAft>
-                <a:spcPts val="600"/>
-              </a:spcAft>
-            </a:pPr>
-            <a:r>
-              <a:rPr sz="1500">
-                <a:solidFill>
-                  <a:srgbClr val="22282E"/>
-                </a:solidFill>
-              </a:rPr>
-              <a:t>•  Unhooking conceptual. Estudia cómo recargar una copia limpia de ntdll.dll desde disco (o KnownDlls) para sobrescribir los hooks en memoria; explica por qué restaura las funciones originales.</a:t>
-            </a:r>
-          </a:p>
-          <a:p>
-            <a:pPr>
-              <a:spcAft>
-                <a:spcPts val="600"/>
-              </a:spcAft>
-            </a:pPr>
-            <a:r>
-              <a:rPr sz="1500">
-                <a:solidFill>
-                  <a:srgbClr val="22282E"/>
-                </a:solidFill>
-              </a:rPr>
-              <a:t>•  Syscalls indirectas. Revisa el patrón de SysWhispers: resolver el número de syscall en runtime y saltar a la instrucción syscall dentro de ntdll para no ser hookeado en usermode.</a:t>
-            </a:r>
-          </a:p>
-          <a:p>
-            <a:pPr>
-              <a:spcAft>
-                <a:spcPts val="600"/>
-              </a:spcAft>
-            </a:pPr>
-            <a:r>
-              <a:rPr sz="1500">
-                <a:solidFill>
-                  <a:srgbClr val="22282E"/>
-                </a:solidFill>
-              </a:rPr>
-              <a:t>•  Ejecución en memoria. Configura tu implante para ejecutarse sin tocar disco (reflective loading) y compara la telemetría frente al binario en disco.</a:t>
-            </a:r>
-          </a:p>
-          <a:p>
-            <a:pPr>
-              <a:spcAft>
-                <a:spcPts val="600"/>
-              </a:spcAft>
-            </a:pPr>
-            <a:r>
-              <a:rPr sz="1500">
-                <a:solidFill>
-                  <a:srgbClr val="22282E"/>
-                </a:solidFill>
-              </a:rPr>
-              <a:t>•  Silenciar ETW (estudio). Comprende el patcheo de EtwEventWrite y por qué reduce visibilidad; observa que el ETW-TI del kernel sigue viendo mucho.</a:t>
-            </a:r>
-          </a:p>
-          <a:p>
-            <a:pPr>
-              <a:spcAft>
-                <a:spcPts val="600"/>
-              </a:spcAft>
-            </a:pPr>
-            <a:r>
-              <a:rPr sz="1500">
-                <a:solidFill>
-                  <a:srgbClr val="22282E"/>
-                </a:solidFill>
-              </a:rPr>
-              <a:t>•  Mide y documenta. Repite la ejecución con cada técnica y anota si el EDR alerta, degradando el ruido paso a paso, y qué fuente de datos aún lo detecta.</a:t>
+              <a:t>•  AV: control antimalware centrado en prevenir o detectar contenido malicioso.</a:t>
+            </a:r>
+          </a:p>
+          <a:p>
+            <a:pPr>
+              <a:spcAft>
+                <a:spcPts val="600"/>
+              </a:spcAft>
+            </a:pPr>
+            <a:r>
+              <a:rPr sz="1500">
+                <a:solidFill>
+                  <a:srgbClr val="22282E"/>
+                </a:solidFill>
+              </a:rPr>
+              <a:t>•  EDR: plataforma que recoge y correlaciona telemetría de endpoints para detectar, investigar y responder.</a:t>
+            </a:r>
+          </a:p>
+          <a:p>
+            <a:pPr>
+              <a:spcAft>
+                <a:spcPts val="600"/>
+              </a:spcAft>
+            </a:pPr>
+            <a:r>
+              <a:rPr sz="1500">
+                <a:solidFill>
+                  <a:srgbClr val="22282E"/>
+                </a:solidFill>
+              </a:rPr>
+              <a:t>•  Sensor: componente que obtiene una señal concreta del sistema.</a:t>
+            </a:r>
+          </a:p>
+          <a:p>
+            <a:pPr>
+              <a:spcAft>
+                <a:spcPts val="600"/>
+              </a:spcAft>
+            </a:pPr>
+            <a:r>
+              <a:rPr sz="1500">
+                <a:solidFill>
+                  <a:srgbClr val="22282E"/>
+                </a:solidFill>
+              </a:rPr>
+              <a:t>•  Hook: redirección o instrumentación de una función para observar o alterar su ejecución.</a:t>
+            </a:r>
+          </a:p>
+          <a:p>
+            <a:pPr>
+              <a:spcAft>
+                <a:spcPts val="600"/>
+              </a:spcAft>
+            </a:pPr>
+            <a:r>
+              <a:rPr sz="1500">
+                <a:solidFill>
+                  <a:srgbClr val="22282E"/>
+                </a:solidFill>
+              </a:rPr>
+              <a:t>•  Modo usuario: espacio donde se ejecutan aplicaciones con acceso restringido al kernel.</a:t>
+            </a:r>
+          </a:p>
+          <a:p>
+            <a:pPr>
+              <a:spcAft>
+                <a:spcPts val="600"/>
+              </a:spcAft>
+            </a:pPr>
+            <a:r>
+              <a:rPr sz="1500">
+                <a:solidFill>
+                  <a:srgbClr val="22282E"/>
+                </a:solidFill>
+              </a:rPr>
+              <a:t>•  Modo kernel: nivel privilegiado que administra procesos, memoria, dispositivos y otros recursos del sistema.</a:t>
+            </a:r>
+          </a:p>
+          <a:p>
+            <a:pPr>
+              <a:spcAft>
+                <a:spcPts val="600"/>
+              </a:spcAft>
+            </a:pPr>
+            <a:r>
+              <a:rPr sz="1500">
+                <a:solidFill>
+                  <a:srgbClr val="22282E"/>
+                </a:solidFill>
+              </a:rPr>
+              <a:t>•  ETW: infraestructura de trazado de Windows basada en proveedores y consumidores de eventos.</a:t>
             </a:r>
           </a:p>
         </p:txBody>
@@ -4554,7 +4975,7 @@
                   <a:srgbClr val="0B3D2E"/>
                 </a:solidFill>
               </a:rPr>
-              <a:t>✍️ Ejercicios</a:t>
+              <a:t>🧰 Herramientas y preparación</a:t>
             </a:r>
           </a:p>
         </p:txBody>
@@ -4592,82 +5013,52 @@
                   <a:srgbClr val="22282E"/>
                 </a:solidFill>
               </a:rPr>
-              <a:t>•  Explica la diferencia entre detección por firma y comportamental con un ejemplo.</a:t>
-            </a:r>
-          </a:p>
-          <a:p>
-            <a:pPr>
-              <a:spcAft>
-                <a:spcPts val="600"/>
-              </a:spcAft>
-            </a:pPr>
-            <a:r>
-              <a:rPr sz="1500">
-                <a:solidFill>
-                  <a:srgbClr val="22282E"/>
-                </a:solidFill>
-              </a:rPr>
-              <a:t>•  Describe cómo un EDR instala un hook en ntdll y cómo el unhooking lo revierte.</a:t>
-            </a:r>
-          </a:p>
-          <a:p>
-            <a:pPr>
-              <a:spcAft>
-                <a:spcPts val="600"/>
-              </a:spcAft>
-            </a:pPr>
-            <a:r>
-              <a:rPr sz="1500">
-                <a:solidFill>
-                  <a:srgbClr val="22282E"/>
-                </a:solidFill>
-              </a:rPr>
-              <a:t>•  Compara syscalls directas e indirectas en términos de sigilo.</a:t>
-            </a:r>
-          </a:p>
-          <a:p>
-            <a:pPr>
-              <a:spcAft>
-                <a:spcPts val="600"/>
-              </a:spcAft>
-            </a:pPr>
-            <a:r>
-              <a:rPr sz="1500">
-                <a:solidFill>
-                  <a:srgbClr val="22282E"/>
-                </a:solidFill>
-              </a:rPr>
-              <a:t>•  Explica por qué la ejecución en memoria genera menos telemetría de disco.</a:t>
-            </a:r>
-          </a:p>
-          <a:p>
-            <a:pPr>
-              <a:spcAft>
-                <a:spcPts val="600"/>
-              </a:spcAft>
-            </a:pPr>
-            <a:r>
-              <a:rPr sz="1500">
-                <a:solidFill>
-                  <a:srgbClr val="22282E"/>
-                </a:solidFill>
-              </a:rPr>
-              <a:t>•  Investiga qué es ETW-TI y por qué es más difícil de evadir que ETW clásico.</a:t>
-            </a:r>
-          </a:p>
-          <a:p>
-            <a:pPr>
-              <a:spcAft>
-                <a:spcPts val="600"/>
-              </a:spcAft>
-            </a:pPr>
-            <a:r>
-              <a:rPr sz="1500">
-                <a:solidFill>
-                  <a:srgbClr val="22282E"/>
-                </a:solidFill>
-              </a:rPr>
-              <a:t>•  Para tres técnicas ofensivas, describe su contramedida defensiva.</a:t>
+              <a:t>•  Un EDR de laboratorio (versión de evaluación o Microsoft Defender for Endpoint en un tenant de prueba) y Sysmon (Parte 8) para telemetría.</a:t>
+            </a:r>
+          </a:p>
+          <a:p>
+            <a:pPr>
+              <a:spcAft>
+                <a:spcPts val="600"/>
+              </a:spcAft>
+            </a:pPr>
+            <a:r>
+              <a:rPr sz="1500">
+                <a:solidFill>
+                  <a:srgbClr val="22282E"/>
+                </a:solidFill>
+              </a:rPr>
+              <a:t>•  Windows internals: entender PE, ntdll y syscalls (repaso Partes 5 y 6).</a:t>
+            </a:r>
+          </a:p>
+          <a:p>
+            <a:pPr>
+              <a:spcAft>
+                <a:spcPts val="600"/>
+              </a:spcAft>
+            </a:pPr>
+            <a:r>
+              <a:rPr sz="1500">
+                <a:solidFill>
+                  <a:srgbClr val="22282E"/>
+                </a:solidFill>
+              </a:rPr>
+              <a:t>•  Proyectos de estudio open source (SysWhispers y referencias de unhooking) para comprender la mecánica.</a:t>
+            </a:r>
+          </a:p>
+          <a:p>
+            <a:pPr>
+              <a:spcAft>
+                <a:spcPts val="600"/>
+              </a:spcAft>
+            </a:pPr>
+            <a:r>
+              <a:rPr sz="1500">
+                <a:solidFill>
+                  <a:srgbClr val="22282E"/>
+                </a:solidFill>
+              </a:rPr>
+              <a:t>•  El C2 de las clases anteriores como carga a evadir.</a:t>
             </a:r>
           </a:p>
         </p:txBody>
@@ -4718,7 +5109,7 @@
                   <a:srgbClr val="0B3D2E"/>
                 </a:solidFill>
               </a:rPr>
-              <a:t>📝 Reto verificable</a:t>
+              <a:t>🧪 Laboratorio guiado</a:t>
             </a:r>
           </a:p>
         </p:txBody>
@@ -4756,22 +5147,97 @@
                   <a:srgbClr val="22282E"/>
                 </a:solidFill>
               </a:rPr>
-              <a:t>•  Partiendo de un implante que el EDR de tu lab detecta, aplica al menos dos técnicas de evasión y documenta el cambio en la telemetría.</a:t>
-            </a:r>
-          </a:p>
-          <a:p>
-            <a:pPr>
-              <a:spcAft>
-                <a:spcPts val="600"/>
-              </a:spcAft>
-            </a:pPr>
-            <a:r>
-              <a:rPr sz="1500">
-                <a:solidFill>
-                  <a:srgbClr val="22282E"/>
-                </a:solidFill>
-              </a:rPr>
-              <a:t>•  Criterio de aceptación: demuestras (con capturas de la consola del EDR/Sysmon) que la línea base generaba una alerta y que tras las técnicas aplicadas cambia el resultado; además, explicas qué fuente de datos aún podría detectarte. Todo en tu laboratorio.</a:t>
+              <a:t>•  Línea base de detección. Ejecuta un implante C2 sin evasión en la VM con EDR y observa la alerta; anota qué evento la disparó.</a:t>
+            </a:r>
+          </a:p>
+          <a:p>
+            <a:pPr>
+              <a:spcAft>
+                <a:spcPts val="600"/>
+              </a:spcAft>
+            </a:pPr>
+            <a:r>
+              <a:rPr sz="1500">
+                <a:solidFill>
+                  <a:srgbClr val="22282E"/>
+                </a:solidFill>
+              </a:rPr>
+              <a:t>•  Analiza la instrumentación. Con un depurador, compara una función como NtAllocateVirtualMemory entre una VM base y la VM vigilada. Si observas una redirección, demuestra su procedencia antes de…</a:t>
+            </a:r>
+          </a:p>
+          <a:p>
+            <a:pPr>
+              <a:spcAft>
+                <a:spcPts val="600"/>
+              </a:spcAft>
+            </a:pPr>
+            <a:r>
+              <a:rPr sz="1500">
+                <a:solidFill>
+                  <a:srgbClr val="22282E"/>
+                </a:solidFill>
+              </a:rPr>
+              <a:t>•  Unhooking conceptual. Estudia cómo recargar una copia limpia de ntdll.dll desde disco (o KnownDlls) para sobrescribir los hooks en memoria; explica por qué restaura las funciones originales.</a:t>
+            </a:r>
+          </a:p>
+          <a:p>
+            <a:pPr>
+              <a:spcAft>
+                <a:spcPts val="600"/>
+              </a:spcAft>
+            </a:pPr>
+            <a:r>
+              <a:rPr sz="1500">
+                <a:solidFill>
+                  <a:srgbClr val="22282E"/>
+                </a:solidFill>
+              </a:rPr>
+              <a:t>•  Syscalls indirectas. Revisa el patrón de SysWhispers: resolver el número de syscall en runtime y saltar a la instrucción syscall dentro de ntdll para no ser hookeado en usermode.</a:t>
+            </a:r>
+          </a:p>
+          <a:p>
+            <a:pPr>
+              <a:spcAft>
+                <a:spcPts val="600"/>
+              </a:spcAft>
+            </a:pPr>
+            <a:r>
+              <a:rPr sz="1500">
+                <a:solidFill>
+                  <a:srgbClr val="22282E"/>
+                </a:solidFill>
+              </a:rPr>
+              <a:t>•  Ejecución en memoria. En una VM desechable, compara una carga reflectiva de prueba con un ejecutable convencional. Registra qué artefactos de archivo disminuyen y qué señales de proceso, memoria y…</a:t>
+            </a:r>
+          </a:p>
+          <a:p>
+            <a:pPr>
+              <a:spcAft>
+                <a:spcPts val="600"/>
+              </a:spcAft>
+            </a:pPr>
+            <a:r>
+              <a:rPr sz="1500">
+                <a:solidFill>
+                  <a:srgbClr val="22282E"/>
+                </a:solidFill>
+              </a:rPr>
+              <a:t>•  Compara fuentes ETW sin deshabilitarlas. Modela qué observación depende del proceso y cuál se origina en componentes más privilegiados. Usa una prueba inocua para comprobar que degradar…</a:t>
+            </a:r>
+          </a:p>
+          <a:p>
+            <a:pPr>
+              <a:spcAft>
+                <a:spcPts val="600"/>
+              </a:spcAft>
+            </a:pPr>
+            <a:r>
+              <a:rPr sz="1500">
+                <a:solidFill>
+                  <a:srgbClr val="22282E"/>
+                </a:solidFill>
+              </a:rPr>
+              <a:t>•  Mide y documenta. Repite la ejecución con cada técnica y anota si el EDR alerta, degradando el ruido paso a paso, y qué fuente de datos aún lo detecta.</a:t>
             </a:r>
           </a:p>
         </p:txBody>
